--- a/Presentation.pptx
+++ b/Presentation.pptx
@@ -147,7 +147,7 @@
     </p:spTree>
     <p:extLst>
       <p:ext uri="{BB962C8B-B14F-4D97-AF65-F5344CB8AC3E}">
-        <p14:creationId xmlns:p14="http://schemas.microsoft.com/office/powerpoint/2010/main" val="925653903"/>
+        <p14:creationId xmlns:p14="http://schemas.microsoft.com/office/powerpoint/2010/main" val="3971320736"/>
       </p:ext>
     </p:extLst>
   </p:cSld>

--- a/Presentation.pptx
+++ b/Presentation.pptx
@@ -147,7 +147,7 @@
     </p:spTree>
     <p:extLst>
       <p:ext uri="{BB962C8B-B14F-4D97-AF65-F5344CB8AC3E}">
-        <p14:creationId xmlns:p14="http://schemas.microsoft.com/office/powerpoint/2010/main" val="3971320736"/>
+        <p14:creationId xmlns:p14="http://schemas.microsoft.com/office/powerpoint/2010/main" val="2658877405"/>
       </p:ext>
     </p:extLst>
   </p:cSld>
@@ -7277,7 +7277,7 @@
                 <a:ea typeface="Calibri" pitchFamily="34" charset="-122"/>
                 <a:cs typeface="Calibri" pitchFamily="34" charset="-120"/>
               </a:rPr>
-              <a:t>Instructors can't scale per-student feedback — manual workflows break past ~30 students</a:t>
+              <a:t>Instructors cannot provide individual written feedback to every student after every quiz — the time cost makes it structurally impossible at scale</a:t>
             </a:r>
             <a:endParaRPr lang="en-US" sz="1100" dirty="0"/>
           </a:p>
